--- a/dist/초5/영어/상호작용과문화/초5_영어_상호작용과문화_02_물건사기.pptx
+++ b/dist/초5/영어/상호작용과문화/초5_영어_상호작용과문화_02_물건사기.pptx
@@ -120,20 +120,20 @@
   <p:extLst>
     <p:ext uri="{521415D9-36F7-43E2-AB2F-B90AF26B5E84}">
       <p14:sectionLst xmlns:p14="http://schemas.microsoft.com/office/powerpoint/2010/main">
-        <p14:section name="도입" id="{34777ce8-9ee9-9899-9863-e21cc2b0c4fe}">
+        <p14:section name="도입" id="{867194a4-9ba4-8446-93d3-080b4fb3858f}">
           <p14:sldIdLst>
             <p14:sldId id="256"/>
             <p14:sldId id="257"/>
           </p14:sldIdLst>
         </p14:section>
-        <p14:section name="개념" id="{0d1d2896-ad20-e9ec-8afd-8580d4078f3b}">
+        <p14:section name="개념" id="{85867911-c1f8-f60a-137d-1f7fc070c2e8}">
           <p14:sldIdLst>
             <p14:sldId id="258"/>
             <p14:sldId id="259"/>
             <p14:sldId id="260"/>
           </p14:sldIdLst>
         </p14:section>
-        <p14:section name="연습" id="{420dfb45-48c9-c781-cf0f-24e74caa36f5}">
+        <p14:section name="연습" id="{b7f3f629-78c2-a823-42a6-71596667686b}">
           <p14:sldIdLst>
             <p14:sldId id="261"/>
             <p14:sldId id="262"/>
@@ -141,19 +141,19 @@
             <p14:sldId id="264"/>
           </p14:sldIdLst>
         </p14:section>
-        <p14:section name="확인" id="{925a0e69-3740-deee-9596-74f3ea3ab056}">
+        <p14:section name="확인" id="{d3602f7e-af20-1950-504a-c9ca712cd077}">
           <p14:sldIdLst>
             <p14:sldId id="265"/>
             <p14:sldId id="266"/>
             <p14:sldId id="267"/>
           </p14:sldIdLst>
         </p14:section>
-        <p14:section name="정리" id="{ecc33ccd-dd5a-a540-01b6-69217a52f460}">
+        <p14:section name="정리" id="{7b80ab43-c5a2-53eb-43db-8d0839a51501}">
           <p14:sldIdLst>
             <p14:sldId id="268"/>
           </p14:sldIdLst>
         </p14:section>
-        <p14:section name="보충" id="{3ea7facc-8b97-f7fb-5983-42d1b9e5292a}">
+        <p14:section name="보충" id="{3f273177-41fb-973d-4297-35b14d4e3a88}">
           <p14:sldIdLst>
             <p14:sldId id="269"/>
           </p14:sldIdLst>
